--- a/ゲーム科2年/00_前期/ゲーム開発Ⅰ/ゲーム物理学/座学/11_微分.pptx
+++ b/ゲーム科2年/00_前期/ゲーム開発Ⅰ/ゲーム物理学/座学/11_微分.pptx
@@ -1143,7 +1143,7 @@
           <a:p>
             <a:fld id="{E9CC885B-4903-4D54-9A93-00025F12DED9}" type="datetimeFigureOut">
               <a:rPr kumimoji="1" lang="ja-JP" altLang="en-US" smtClean="0"/>
-              <a:t>2024/12/17</a:t>
+              <a:t>2025/10/6</a:t>
             </a:fld>
             <a:endParaRPr kumimoji="1" lang="ja-JP" altLang="en-US"/>
           </a:p>
@@ -1373,7 +1373,7 @@
           <a:p>
             <a:fld id="{E9CC885B-4903-4D54-9A93-00025F12DED9}" type="datetimeFigureOut">
               <a:rPr kumimoji="1" lang="ja-JP" altLang="en-US" smtClean="0"/>
-              <a:t>2024/12/17</a:t>
+              <a:t>2025/10/6</a:t>
             </a:fld>
             <a:endParaRPr kumimoji="1" lang="ja-JP" altLang="en-US"/>
           </a:p>
@@ -1613,7 +1613,7 @@
           <a:p>
             <a:fld id="{E9CC885B-4903-4D54-9A93-00025F12DED9}" type="datetimeFigureOut">
               <a:rPr kumimoji="1" lang="ja-JP" altLang="en-US" smtClean="0"/>
-              <a:t>2024/12/17</a:t>
+              <a:t>2025/10/6</a:t>
             </a:fld>
             <a:endParaRPr kumimoji="1" lang="ja-JP" altLang="en-US"/>
           </a:p>
@@ -1843,7 +1843,7 @@
           <a:p>
             <a:fld id="{E9CC885B-4903-4D54-9A93-00025F12DED9}" type="datetimeFigureOut">
               <a:rPr kumimoji="1" lang="ja-JP" altLang="en-US" smtClean="0"/>
-              <a:t>2024/12/17</a:t>
+              <a:t>2025/10/6</a:t>
             </a:fld>
             <a:endParaRPr kumimoji="1" lang="ja-JP" altLang="en-US"/>
           </a:p>
@@ -2118,7 +2118,7 @@
           <a:p>
             <a:fld id="{E9CC885B-4903-4D54-9A93-00025F12DED9}" type="datetimeFigureOut">
               <a:rPr kumimoji="1" lang="ja-JP" altLang="en-US" smtClean="0"/>
-              <a:t>2024/12/17</a:t>
+              <a:t>2025/10/6</a:t>
             </a:fld>
             <a:endParaRPr kumimoji="1" lang="ja-JP" altLang="en-US"/>
           </a:p>
@@ -2447,7 +2447,7 @@
           <a:p>
             <a:fld id="{E9CC885B-4903-4D54-9A93-00025F12DED9}" type="datetimeFigureOut">
               <a:rPr kumimoji="1" lang="ja-JP" altLang="en-US" smtClean="0"/>
-              <a:t>2024/12/17</a:t>
+              <a:t>2025/10/6</a:t>
             </a:fld>
             <a:endParaRPr kumimoji="1" lang="ja-JP" altLang="en-US"/>
           </a:p>
@@ -2923,7 +2923,7 @@
           <a:p>
             <a:fld id="{E9CC885B-4903-4D54-9A93-00025F12DED9}" type="datetimeFigureOut">
               <a:rPr kumimoji="1" lang="ja-JP" altLang="en-US" smtClean="0"/>
-              <a:t>2024/12/17</a:t>
+              <a:t>2025/10/6</a:t>
             </a:fld>
             <a:endParaRPr kumimoji="1" lang="ja-JP" altLang="en-US"/>
           </a:p>
@@ -3064,7 +3064,7 @@
           <a:p>
             <a:fld id="{E9CC885B-4903-4D54-9A93-00025F12DED9}" type="datetimeFigureOut">
               <a:rPr kumimoji="1" lang="ja-JP" altLang="en-US" smtClean="0"/>
-              <a:t>2024/12/17</a:t>
+              <a:t>2025/10/6</a:t>
             </a:fld>
             <a:endParaRPr kumimoji="1" lang="ja-JP" altLang="en-US"/>
           </a:p>
@@ -3177,7 +3177,7 @@
           <a:p>
             <a:fld id="{E9CC885B-4903-4D54-9A93-00025F12DED9}" type="datetimeFigureOut">
               <a:rPr kumimoji="1" lang="ja-JP" altLang="en-US" smtClean="0"/>
-              <a:t>2024/12/17</a:t>
+              <a:t>2025/10/6</a:t>
             </a:fld>
             <a:endParaRPr kumimoji="1" lang="ja-JP" altLang="en-US"/>
           </a:p>
@@ -3520,7 +3520,7 @@
           <a:p>
             <a:fld id="{E9CC885B-4903-4D54-9A93-00025F12DED9}" type="datetimeFigureOut">
               <a:rPr kumimoji="1" lang="ja-JP" altLang="en-US" smtClean="0"/>
-              <a:t>2024/12/17</a:t>
+              <a:t>2025/10/6</a:t>
             </a:fld>
             <a:endParaRPr kumimoji="1" lang="ja-JP" altLang="en-US"/>
           </a:p>
@@ -3808,7 +3808,7 @@
           <a:p>
             <a:fld id="{E9CC885B-4903-4D54-9A93-00025F12DED9}" type="datetimeFigureOut">
               <a:rPr kumimoji="1" lang="ja-JP" altLang="en-US" smtClean="0"/>
-              <a:t>2024/12/17</a:t>
+              <a:t>2025/10/6</a:t>
             </a:fld>
             <a:endParaRPr kumimoji="1" lang="ja-JP" altLang="en-US"/>
           </a:p>
@@ -4081,7 +4081,7 @@
           <a:p>
             <a:fld id="{E9CC885B-4903-4D54-9A93-00025F12DED9}" type="datetimeFigureOut">
               <a:rPr kumimoji="1" lang="ja-JP" altLang="en-US" smtClean="0"/>
-              <a:t>2024/12/17</a:t>
+              <a:t>2025/10/6</a:t>
             </a:fld>
             <a:endParaRPr kumimoji="1" lang="ja-JP" altLang="en-US"/>
           </a:p>
@@ -4725,13 +4725,13 @@
             </a:r>
             <a:r>
               <a:rPr kumimoji="1" lang="en-US" altLang="ja-JP" sz="3200" b="1" u="sng" dirty="0"/>
-              <a:t>2</a:t>
+              <a:t>3</a:t>
             </a:r>
           </a:p>
         </p:txBody>
       </p:sp>
-      <mc:AlternateContent xmlns:mc="http://schemas.openxmlformats.org/markup-compatibility/2006">
-        <mc:Choice xmlns:a14="http://schemas.microsoft.com/office/drawing/2010/main" Requires="a14">
+      <mc:AlternateContent xmlns:mc="http://schemas.openxmlformats.org/markup-compatibility/2006" xmlns:a14="http://schemas.microsoft.com/office/drawing/2010/main">
+        <mc:Choice Requires="a14">
           <p:sp>
             <p:nvSpPr>
               <p:cNvPr id="6" name="テキスト ボックス 5">
@@ -4823,13 +4823,7 @@
                           <a:rPr lang="en-US" altLang="ja-JP" sz="2400" b="0" i="1" smtClean="0">
                             <a:latin typeface="Cambria Math" panose="02040503050406030204" pitchFamily="18" charset="0"/>
                           </a:rPr>
-                          <m:t>−</m:t>
-                        </m:r>
-                        <m:r>
-                          <a:rPr lang="en-US" altLang="ja-JP" sz="2400" b="0" i="1" smtClean="0">
-                            <a:latin typeface="Cambria Math" panose="02040503050406030204" pitchFamily="18" charset="0"/>
-                          </a:rPr>
-                          <m:t>0.81</m:t>
+                          <m:t>−0.81</m:t>
                         </m:r>
                         <m:r>
                           <a:rPr lang="en-US" altLang="ja-JP" sz="2400" i="1">
@@ -4902,7 +4896,7 @@
             </p:txBody>
           </p:sp>
         </mc:Choice>
-        <mc:Fallback>
+        <mc:Fallback xmlns="">
           <p:sp>
             <p:nvSpPr>
               <p:cNvPr id="6" name="テキスト ボックス 5">
@@ -5247,8 +5241,8 @@
           </a:p>
         </p:txBody>
       </p:sp>
-      <mc:AlternateContent xmlns:mc="http://schemas.openxmlformats.org/markup-compatibility/2006">
-        <mc:Choice xmlns:a14="http://schemas.microsoft.com/office/drawing/2010/main" Requires="a14">
+      <mc:AlternateContent xmlns:mc="http://schemas.openxmlformats.org/markup-compatibility/2006" xmlns:a14="http://schemas.microsoft.com/office/drawing/2010/main">
+        <mc:Choice Requires="a14">
           <p:sp>
             <p:nvSpPr>
               <p:cNvPr id="6" name="テキスト ボックス 5">
@@ -5730,7 +5724,7 @@
             </p:txBody>
           </p:sp>
         </mc:Choice>
-        <mc:Fallback>
+        <mc:Fallback xmlns="">
           <p:sp>
             <p:nvSpPr>
               <p:cNvPr id="6" name="テキスト ボックス 5">
@@ -5893,8 +5887,8 @@
           </a:p>
         </p:txBody>
       </p:sp>
-      <mc:AlternateContent xmlns:mc="http://schemas.openxmlformats.org/markup-compatibility/2006">
-        <mc:Choice xmlns:a14="http://schemas.microsoft.com/office/drawing/2010/main" Requires="a14">
+      <mc:AlternateContent xmlns:mc="http://schemas.openxmlformats.org/markup-compatibility/2006" xmlns:a14="http://schemas.microsoft.com/office/drawing/2010/main">
+        <mc:Choice Requires="a14">
           <p:sp>
             <p:nvSpPr>
               <p:cNvPr id="6" name="テキスト ボックス 5">
@@ -6088,25 +6082,7 @@
                       <a:rPr lang="en-US" altLang="ja-JP" sz="2400" i="1">
                         <a:latin typeface="Cambria Math" panose="02040503050406030204" pitchFamily="18" charset="0"/>
                       </a:rPr>
-                      <m:t>=3</m:t>
-                    </m:r>
-                    <m:r>
-                      <a:rPr lang="en-US" altLang="ja-JP" sz="2400" i="1">
-                        <a:latin typeface="Cambria Math" panose="02040503050406030204" pitchFamily="18" charset="0"/>
-                      </a:rPr>
-                      <m:t>×</m:t>
-                    </m:r>
-                    <m:r>
-                      <a:rPr lang="en-US" altLang="ja-JP" sz="2400" i="1">
-                        <a:latin typeface="Cambria Math" panose="02040503050406030204" pitchFamily="18" charset="0"/>
-                      </a:rPr>
-                      <m:t>2</m:t>
-                    </m:r>
-                    <m:r>
-                      <a:rPr lang="en-US" altLang="ja-JP" sz="2400" i="1">
-                        <a:latin typeface="Cambria Math" panose="02040503050406030204" pitchFamily="18" charset="0"/>
-                      </a:rPr>
-                      <m:t>×</m:t>
+                      <m:t>=3×2×</m:t>
                     </m:r>
                     <m:sSup>
                       <m:sSupPr>
@@ -6137,25 +6113,7 @@
                       <a:rPr lang="en-US" altLang="ja-JP" sz="2400" i="1">
                         <a:latin typeface="Cambria Math" panose="02040503050406030204" pitchFamily="18" charset="0"/>
                       </a:rPr>
-                      <m:t>+4</m:t>
-                    </m:r>
-                    <m:r>
-                      <a:rPr lang="en-US" altLang="ja-JP" sz="2400" i="1">
-                        <a:latin typeface="Cambria Math" panose="02040503050406030204" pitchFamily="18" charset="0"/>
-                      </a:rPr>
-                      <m:t>×</m:t>
-                    </m:r>
-                    <m:r>
-                      <a:rPr lang="en-US" altLang="ja-JP" sz="2400" i="1">
-                        <a:latin typeface="Cambria Math" panose="02040503050406030204" pitchFamily="18" charset="0"/>
-                      </a:rPr>
-                      <m:t>1</m:t>
-                    </m:r>
-                    <m:r>
-                      <a:rPr lang="en-US" altLang="ja-JP" sz="2400" i="1">
-                        <a:latin typeface="Cambria Math" panose="02040503050406030204" pitchFamily="18" charset="0"/>
-                      </a:rPr>
-                      <m:t>×</m:t>
+                      <m:t>+4×1×</m:t>
                     </m:r>
                     <m:sSup>
                       <m:sSupPr>
@@ -6186,25 +6144,7 @@
                       <a:rPr lang="en-US" altLang="ja-JP" sz="2400" i="1" dirty="0">
                         <a:latin typeface="Cambria Math" panose="02040503050406030204" pitchFamily="18" charset="0"/>
                       </a:rPr>
-                      <m:t>+10</m:t>
-                    </m:r>
-                    <m:r>
-                      <a:rPr lang="en-US" altLang="ja-JP" sz="2400" i="1" dirty="0">
-                        <a:latin typeface="Cambria Math" panose="02040503050406030204" pitchFamily="18" charset="0"/>
-                      </a:rPr>
-                      <m:t>×</m:t>
-                    </m:r>
-                    <m:r>
-                      <a:rPr lang="en-US" altLang="ja-JP" sz="2400" i="1" dirty="0">
-                        <a:latin typeface="Cambria Math" panose="02040503050406030204" pitchFamily="18" charset="0"/>
-                      </a:rPr>
-                      <m:t>0</m:t>
-                    </m:r>
-                    <m:r>
-                      <a:rPr lang="en-US" altLang="ja-JP" sz="2400" i="1" dirty="0">
-                        <a:latin typeface="Cambria Math" panose="02040503050406030204" pitchFamily="18" charset="0"/>
-                      </a:rPr>
-                      <m:t>×</m:t>
+                      <m:t>+10×0×</m:t>
                     </m:r>
                     <m:sSup>
                       <m:sSupPr>
@@ -6457,7 +6397,7 @@
             </p:txBody>
           </p:sp>
         </mc:Choice>
-        <mc:Fallback>
+        <mc:Fallback xmlns="">
           <p:sp>
             <p:nvSpPr>
               <p:cNvPr id="6" name="テキスト ボックス 5">
@@ -6888,8 +6828,8 @@
           </a:p>
         </p:txBody>
       </p:sp>
-      <mc:AlternateContent xmlns:mc="http://schemas.openxmlformats.org/markup-compatibility/2006">
-        <mc:Choice xmlns:a14="http://schemas.microsoft.com/office/drawing/2010/main" Requires="a14">
+      <mc:AlternateContent xmlns:mc="http://schemas.openxmlformats.org/markup-compatibility/2006" xmlns:a14="http://schemas.microsoft.com/office/drawing/2010/main">
+        <mc:Choice Requires="a14">
           <p:sp>
             <p:nvSpPr>
               <p:cNvPr id="6" name="テキスト ボックス 5">
@@ -6918,7 +6858,6 @@
               </a:bodyPr>
               <a:lstStyle/>
               <a:p>
-                <a:pPr/>
                 <a14:m>
                   <m:oMath xmlns:m="http://schemas.openxmlformats.org/officeDocument/2006/math">
                     <m:r>
@@ -7020,11 +6959,9 @@
                 <a:endParaRPr lang="en-US" altLang="ja-JP" sz="2400" dirty="0"/>
               </a:p>
               <a:p>
-                <a:pPr/>
                 <a:endParaRPr lang="en-US" altLang="ja-JP" sz="2400" dirty="0"/>
               </a:p>
               <a:p>
-                <a:pPr/>
                 <a:r>
                   <a:rPr lang="ja-JP" altLang="en-US" sz="2400" b="1" dirty="0">
                     <a:solidFill>
@@ -7129,7 +7066,6 @@
                 </a:endParaRPr>
               </a:p>
               <a:p>
-                <a:pPr/>
                 <a14:m>
                   <m:oMath xmlns:m="http://schemas.openxmlformats.org/officeDocument/2006/math">
                     <m:r>
@@ -7241,7 +7177,6 @@
                 </a:endParaRPr>
               </a:p>
               <a:p>
-                <a:pPr/>
                 <a:endParaRPr lang="en-US" altLang="ja-JP" sz="2400" b="1" dirty="0">
                   <a:solidFill>
                     <a:srgbClr val="FF0000"/>
@@ -7249,7 +7184,6 @@
                 </a:endParaRPr>
               </a:p>
               <a:p>
-                <a:pPr/>
                 <a14:m>
                   <m:oMath xmlns:m="http://schemas.openxmlformats.org/officeDocument/2006/math">
                     <m:r>
@@ -7280,7 +7214,7 @@
             </p:txBody>
           </p:sp>
         </mc:Choice>
-        <mc:Fallback>
+        <mc:Fallback xmlns="">
           <p:sp>
             <p:nvSpPr>
               <p:cNvPr id="6" name="テキスト ボックス 5">
@@ -7391,8 +7325,8 @@
           </a:p>
         </p:txBody>
       </p:sp>
-      <mc:AlternateContent xmlns:mc="http://schemas.openxmlformats.org/markup-compatibility/2006">
-        <mc:Choice xmlns:a14="http://schemas.microsoft.com/office/drawing/2010/main" Requires="a14">
+      <mc:AlternateContent xmlns:mc="http://schemas.openxmlformats.org/markup-compatibility/2006" xmlns:a14="http://schemas.microsoft.com/office/drawing/2010/main">
+        <mc:Choice Requires="a14">
           <p:sp>
             <p:nvSpPr>
               <p:cNvPr id="6" name="テキスト ボックス 5">
@@ -7531,11 +7465,9 @@
                 <a:endParaRPr lang="en-US" altLang="ja-JP" sz="2400" dirty="0"/>
               </a:p>
               <a:p>
-                <a:pPr/>
                 <a:endParaRPr lang="en-US" altLang="ja-JP" sz="2400" dirty="0"/>
               </a:p>
               <a:p>
-                <a:pPr/>
                 <a:r>
                   <a:rPr lang="ja-JP" altLang="en-US" sz="2400" b="1" dirty="0">
                     <a:solidFill>
@@ -7640,7 +7572,6 @@
                 </a:endParaRPr>
               </a:p>
               <a:p>
-                <a:pPr/>
                 <a14:m>
                   <m:oMath xmlns:m="http://schemas.openxmlformats.org/officeDocument/2006/math">
                     <m:r>
@@ -7737,16 +7668,7 @@
                           </a:solidFill>
                           <a:latin typeface="Cambria Math" panose="02040503050406030204" pitchFamily="18" charset="0"/>
                         </a:rPr>
-                        <m:t>=</m:t>
-                      </m:r>
-                      <m:r>
-                        <a:rPr lang="en-US" altLang="ja-JP" sz="2400" b="0" i="1" smtClean="0">
-                          <a:solidFill>
-                            <a:schemeClr val="tx1"/>
-                          </a:solidFill>
-                          <a:latin typeface="Cambria Math" panose="02040503050406030204" pitchFamily="18" charset="0"/>
-                        </a:rPr>
-                        <m:t>2</m:t>
+                        <m:t>=2</m:t>
                       </m:r>
                       <m:r>
                         <a:rPr lang="en-US" altLang="ja-JP" sz="2400" b="0" i="1" smtClean="0">
@@ -7767,7 +7689,6 @@
                 </a:endParaRPr>
               </a:p>
               <a:p>
-                <a:pPr/>
                 <a:endParaRPr lang="en-US" altLang="ja-JP" sz="2400" b="1" dirty="0">
                   <a:solidFill>
                     <a:srgbClr val="FF0000"/>
@@ -7775,7 +7696,6 @@
                 </a:endParaRPr>
               </a:p>
               <a:p>
-                <a:pPr/>
                 <a14:m>
                   <m:oMath xmlns:m="http://schemas.openxmlformats.org/officeDocument/2006/math">
                     <m:r>
@@ -7839,11 +7759,9 @@
                 <a:endParaRPr lang="en-US" altLang="ja-JP" sz="2400" dirty="0"/>
               </a:p>
               <a:p>
-                <a:pPr/>
                 <a:endParaRPr lang="en-US" altLang="ja-JP" sz="2400" dirty="0"/>
               </a:p>
               <a:p>
-                <a:pPr/>
                 <a:r>
                   <a:rPr lang="ja-JP" altLang="en-US" sz="2400" dirty="0"/>
                   <a:t>このように導関数より簡単に計算できます。</a:t>
@@ -7853,7 +7771,7 @@
             </p:txBody>
           </p:sp>
         </mc:Choice>
-        <mc:Fallback>
+        <mc:Fallback xmlns="">
           <p:sp>
             <p:nvSpPr>
               <p:cNvPr id="6" name="テキスト ボックス 5">
@@ -7964,8 +7882,8 @@
           </a:p>
         </p:txBody>
       </p:sp>
-      <mc:AlternateContent xmlns:mc="http://schemas.openxmlformats.org/markup-compatibility/2006">
-        <mc:Choice xmlns:a14="http://schemas.microsoft.com/office/drawing/2010/main" Requires="a14">
+      <mc:AlternateContent xmlns:mc="http://schemas.openxmlformats.org/markup-compatibility/2006" xmlns:a14="http://schemas.microsoft.com/office/drawing/2010/main">
+        <mc:Choice Requires="a14">
           <p:sp>
             <p:nvSpPr>
               <p:cNvPr id="6" name="テキスト ボックス 5">
@@ -8227,7 +8145,6 @@
                 <a:endParaRPr lang="en-US" altLang="ja-JP" sz="2400" dirty="0"/>
               </a:p>
               <a:p>
-                <a:pPr/>
                 <a14:m>
                   <m:oMath xmlns:m="http://schemas.openxmlformats.org/officeDocument/2006/math">
                     <m:r>
@@ -8297,13 +8214,7 @@
                         <a:rPr lang="en-US" altLang="ja-JP" sz="2400" b="0" i="1" smtClean="0">
                           <a:latin typeface="Cambria Math" panose="02040503050406030204" pitchFamily="18" charset="0"/>
                         </a:rPr>
-                        <m:t>=10−</m:t>
-                      </m:r>
-                      <m:r>
-                        <a:rPr lang="en-US" altLang="ja-JP" sz="2400" b="0" i="1" smtClean="0">
-                          <a:latin typeface="Cambria Math" panose="02040503050406030204" pitchFamily="18" charset="0"/>
-                        </a:rPr>
-                        <m:t>9.8</m:t>
+                        <m:t>=10−9.8</m:t>
                       </m:r>
                       <m:r>
                         <a:rPr lang="en-US" altLang="ja-JP" sz="2400" b="0" i="1" smtClean="0">
@@ -8317,7 +8228,6 @@
                 <a:endParaRPr lang="en-US" altLang="ja-JP" sz="2400" dirty="0"/>
               </a:p>
               <a:p>
-                <a:pPr/>
                 <a:r>
                   <a:rPr lang="ja-JP" altLang="en-US" sz="2400" dirty="0"/>
                   <a:t>もう一度</a:t>
@@ -8388,7 +8298,6 @@
                 <a:endParaRPr lang="en-US" altLang="ja-JP" sz="2400" dirty="0"/>
               </a:p>
               <a:p>
-                <a:pPr/>
                 <a14:m>
                   <m:oMath xmlns:m="http://schemas.openxmlformats.org/officeDocument/2006/math">
                     <m:r>
@@ -8423,11 +8332,9 @@
                 <a:endParaRPr lang="en-US" altLang="ja-JP" sz="2400" dirty="0"/>
               </a:p>
               <a:p>
-                <a:pPr/>
                 <a:endParaRPr lang="en-US" altLang="ja-JP" sz="2400" dirty="0"/>
               </a:p>
               <a:p>
-                <a:pPr/>
                 <a:r>
                   <a:rPr lang="en-US" altLang="ja-JP" sz="2400" dirty="0"/>
                   <a:t>※</a:t>
@@ -8441,7 +8348,7 @@
             </p:txBody>
           </p:sp>
         </mc:Choice>
-        <mc:Fallback>
+        <mc:Fallback xmlns="">
           <p:sp>
             <p:nvSpPr>
               <p:cNvPr id="6" name="テキスト ボックス 5">
@@ -8555,8 +8462,8 @@
           </a:p>
         </p:txBody>
       </p:sp>
-      <mc:AlternateContent xmlns:mc="http://schemas.openxmlformats.org/markup-compatibility/2006">
-        <mc:Choice xmlns:a14="http://schemas.microsoft.com/office/drawing/2010/main" Requires="a14">
+      <mc:AlternateContent xmlns:mc="http://schemas.openxmlformats.org/markup-compatibility/2006" xmlns:a14="http://schemas.microsoft.com/office/drawing/2010/main">
+        <mc:Choice Requires="a14">
           <p:sp>
             <p:nvSpPr>
               <p:cNvPr id="6" name="テキスト ボックス 5">
@@ -8868,7 +8775,7 @@
             </p:txBody>
           </p:sp>
         </mc:Choice>
-        <mc:Fallback>
+        <mc:Fallback xmlns="">
           <p:sp>
             <p:nvSpPr>
               <p:cNvPr id="6" name="テキスト ボックス 5">
@@ -8982,8 +8889,8 @@
           </a:p>
         </p:txBody>
       </p:sp>
-      <mc:AlternateContent xmlns:mc="http://schemas.openxmlformats.org/markup-compatibility/2006">
-        <mc:Choice xmlns:a14="http://schemas.microsoft.com/office/drawing/2010/main" Requires="a14">
+      <mc:AlternateContent xmlns:mc="http://schemas.openxmlformats.org/markup-compatibility/2006" xmlns:a14="http://schemas.microsoft.com/office/drawing/2010/main">
+        <mc:Choice Requires="a14">
           <p:sp>
             <p:nvSpPr>
               <p:cNvPr id="6" name="テキスト ボックス 5">
@@ -9136,7 +9043,7 @@
             </p:txBody>
           </p:sp>
         </mc:Choice>
-        <mc:Fallback>
+        <mc:Fallback xmlns="">
           <p:sp>
             <p:nvSpPr>
               <p:cNvPr id="6" name="テキスト ボックス 5">
